--- a/src/ppt-super/assets/tpl-101-insight-lineage-map/template.pptx
+++ b/src/ppt-super/assets/tpl-101-insight-lineage-map/template.pptx
@@ -3104,8 +3104,8 @@
         </p:nvSpPr>
         <p:spPr>
           <a:xfrm>
-            <a:off x="279400" y="127000"/>
-            <a:ext cx="2413000" cy="215900"/>
+            <a:off x="279400" y="109537"/>
+            <a:ext cx="2413000" cy="250825"/>
           </a:xfrm>
           <a:prstGeom prst="rect">
             <a:avLst/>
@@ -3118,9 +3118,16 @@
           </a:bodyPr>
           <a:lstStyle/>
           <a:p>
-            <a:pPr algn="l"/>
-            <a:r>
-              <a:rPr sz="1500" b="0">
+            <a:pPr algn="l">
+              <a:spcBef>
+                <a:spcPts val="0"/>
+              </a:spcBef>
+              <a:spcAft>
+                <a:spcPts val="0"/>
+              </a:spcAft>
+            </a:pPr>
+            <a:r>
+              <a:rPr sz="1500" b="0" lang="zh-CN" altLang="zh-CN">
                 <a:solidFill>
                   <a:srgbClr val="617089"/>
                 </a:solidFill>
@@ -3155,9 +3162,16 @@
           </a:bodyPr>
           <a:lstStyle/>
           <a:p>
-            <a:pPr algn="r"/>
-            <a:r>
-              <a:rPr sz="1400" b="0">
+            <a:pPr algn="r">
+              <a:spcBef>
+                <a:spcPts val="0"/>
+              </a:spcBef>
+              <a:spcAft>
+                <a:spcPts val="0"/>
+              </a:spcAft>
+            </a:pPr>
+            <a:r>
+              <a:rPr sz="1400" b="0" lang="zh-CN" altLang="zh-CN">
                 <a:solidFill>
                   <a:srgbClr val="617089"/>
                 </a:solidFill>
@@ -3227,9 +3241,16 @@
           </a:bodyPr>
           <a:lstStyle/>
           <a:p>
-            <a:pPr algn="l"/>
-            <a:r>
-              <a:rPr sz="2500" b="1">
+            <a:pPr algn="l">
+              <a:spcBef>
+                <a:spcPts val="0"/>
+              </a:spcBef>
+              <a:spcAft>
+                <a:spcPts val="0"/>
+              </a:spcAft>
+            </a:pPr>
+            <a:r>
+              <a:rPr sz="2500" b="1" lang="zh-CN" altLang="zh-CN">
                 <a:solidFill>
                   <a:srgbClr val="B90A0A"/>
                 </a:solidFill>
@@ -3264,9 +3285,16 @@
           </a:bodyPr>
           <a:lstStyle/>
           <a:p>
-            <a:pPr algn="l"/>
-            <a:r>
-              <a:rPr sz="1400" b="0">
+            <a:pPr algn="l">
+              <a:spcBef>
+                <a:spcPts val="0"/>
+              </a:spcBef>
+              <a:spcAft>
+                <a:spcPts val="0"/>
+              </a:spcAft>
+            </a:pPr>
+            <a:r>
+              <a:rPr sz="1400" b="0" lang="zh-CN" altLang="zh-CN">
                 <a:solidFill>
                   <a:srgbClr val="14213D"/>
                 </a:solidFill>
@@ -3301,9 +3329,16 @@
           </a:bodyPr>
           <a:lstStyle/>
           <a:p>
-            <a:pPr algn="r"/>
-            <a:r>
-              <a:rPr sz="900" b="0">
+            <a:pPr algn="r">
+              <a:spcBef>
+                <a:spcPts val="0"/>
+              </a:spcBef>
+              <a:spcAft>
+                <a:spcPts val="0"/>
+              </a:spcAft>
+            </a:pPr>
+            <a:r>
+              <a:rPr sz="900" b="0" lang="zh-CN" altLang="zh-CN">
                 <a:solidFill>
                   <a:srgbClr val="617089"/>
                 </a:solidFill>
@@ -3357,7 +3392,14 @@
           <a:bodyPr rtlCol="0" anchor="ctr"/>
           <a:lstStyle/>
           <a:p>
-            <a:pPr algn="ctr"/>
+            <a:pPr algn="ctr">
+              <a:spcBef>
+                <a:spcPts val="0"/>
+              </a:spcBef>
+              <a:spcAft>
+                <a:spcPts val="0"/>
+              </a:spcAft>
+            </a:pPr>
           </a:p>
         </p:txBody>
       </p:sp>
@@ -3402,7 +3444,14 @@
           <a:bodyPr rtlCol="0" anchor="ctr"/>
           <a:lstStyle/>
           <a:p>
-            <a:pPr algn="ctr"/>
+            <a:pPr algn="ctr">
+              <a:spcBef>
+                <a:spcPts val="0"/>
+              </a:spcBef>
+              <a:spcAft>
+                <a:spcPts val="0"/>
+              </a:spcAft>
+            </a:pPr>
           </a:p>
         </p:txBody>
       </p:sp>
@@ -3414,8 +3463,8 @@
         </p:nvSpPr>
         <p:spPr>
           <a:xfrm>
-            <a:off x="368300" y="1568450"/>
-            <a:ext cx="2222500" cy="190500"/>
+            <a:off x="368300" y="1523047"/>
+            <a:ext cx="2222500" cy="281305"/>
           </a:xfrm>
           <a:prstGeom prst="rect">
             <a:avLst/>
@@ -3428,9 +3477,16 @@
           </a:bodyPr>
           <a:lstStyle/>
           <a:p>
-            <a:pPr algn="ctr"/>
-            <a:r>
-              <a:rPr sz="1700" b="1">
+            <a:pPr algn="ctr">
+              <a:spcBef>
+                <a:spcPts val="0"/>
+              </a:spcBef>
+              <a:spcAft>
+                <a:spcPts val="0"/>
+              </a:spcAft>
+            </a:pPr>
+            <a:r>
+              <a:rPr sz="1700" b="1" lang="zh-CN" altLang="zh-CN">
                 <a:solidFill>
                   <a:srgbClr val="FFFFFF"/>
                 </a:solidFill>
@@ -3484,7 +3540,14 @@
           <a:bodyPr rtlCol="0" anchor="ctr"/>
           <a:lstStyle/>
           <a:p>
-            <a:pPr algn="ctr"/>
+            <a:pPr algn="ctr">
+              <a:spcBef>
+                <a:spcPts val="0"/>
+              </a:spcBef>
+              <a:spcAft>
+                <a:spcPts val="0"/>
+              </a:spcAft>
+            </a:pPr>
           </a:p>
         </p:txBody>
       </p:sp>
@@ -3566,8 +3629,8 @@
         </p:nvSpPr>
         <p:spPr>
           <a:xfrm>
-            <a:off x="876300" y="2019300"/>
-            <a:ext cx="1587500" cy="177800"/>
+            <a:off x="876300" y="1982787"/>
+            <a:ext cx="1587500" cy="250825"/>
           </a:xfrm>
           <a:prstGeom prst="rect">
             <a:avLst/>
@@ -3580,9 +3643,16 @@
           </a:bodyPr>
           <a:lstStyle/>
           <a:p>
-            <a:pPr algn="l"/>
-            <a:r>
-              <a:rPr sz="1500" b="1">
+            <a:pPr algn="l">
+              <a:spcBef>
+                <a:spcPts val="0"/>
+              </a:spcBef>
+              <a:spcAft>
+                <a:spcPts val="0"/>
+              </a:spcAft>
+            </a:pPr>
+            <a:r>
+              <a:rPr sz="1500" b="1" lang="zh-CN" altLang="zh-CN">
                 <a:solidFill>
                   <a:srgbClr val="0B3D91"/>
                 </a:solidFill>
@@ -3617,9 +3687,16 @@
           </a:bodyPr>
           <a:lstStyle/>
           <a:p>
-            <a:pPr algn="l"/>
-            <a:r>
-              <a:rPr sz="860" b="0">
+            <a:pPr algn="l">
+              <a:spcBef>
+                <a:spcPts val="0"/>
+              </a:spcBef>
+              <a:spcAft>
+                <a:spcPts val="0"/>
+              </a:spcAft>
+            </a:pPr>
+            <a:r>
+              <a:rPr sz="860" b="0" lang="zh-CN" altLang="zh-CN">
                 <a:solidFill>
                   <a:srgbClr val="14213D"/>
                 </a:solidFill>
@@ -3709,7 +3786,14 @@
           <a:bodyPr rtlCol="0" anchor="ctr"/>
           <a:lstStyle/>
           <a:p>
-            <a:pPr algn="ctr"/>
+            <a:pPr algn="ctr">
+              <a:spcBef>
+                <a:spcPts val="0"/>
+              </a:spcBef>
+              <a:spcAft>
+                <a:spcPts val="0"/>
+              </a:spcAft>
+            </a:pPr>
           </a:p>
         </p:txBody>
       </p:sp>
@@ -3791,8 +3875,8 @@
         </p:nvSpPr>
         <p:spPr>
           <a:xfrm>
-            <a:off x="876300" y="3187700"/>
-            <a:ext cx="1587500" cy="177800"/>
+            <a:off x="876300" y="3151187"/>
+            <a:ext cx="1587500" cy="250825"/>
           </a:xfrm>
           <a:prstGeom prst="rect">
             <a:avLst/>
@@ -3805,9 +3889,16 @@
           </a:bodyPr>
           <a:lstStyle/>
           <a:p>
-            <a:pPr algn="l"/>
-            <a:r>
-              <a:rPr sz="1500" b="1">
+            <a:pPr algn="l">
+              <a:spcBef>
+                <a:spcPts val="0"/>
+              </a:spcBef>
+              <a:spcAft>
+                <a:spcPts val="0"/>
+              </a:spcAft>
+            </a:pPr>
+            <a:r>
+              <a:rPr sz="1500" b="1" lang="zh-CN" altLang="zh-CN">
                 <a:solidFill>
                   <a:srgbClr val="0B3D91"/>
                 </a:solidFill>
@@ -3842,9 +3933,16 @@
           </a:bodyPr>
           <a:lstStyle/>
           <a:p>
-            <a:pPr algn="l"/>
-            <a:r>
-              <a:rPr sz="860" b="0">
+            <a:pPr algn="l">
+              <a:spcBef>
+                <a:spcPts val="0"/>
+              </a:spcBef>
+              <a:spcAft>
+                <a:spcPts val="0"/>
+              </a:spcAft>
+            </a:pPr>
+            <a:r>
+              <a:rPr sz="860" b="0" lang="zh-CN" altLang="zh-CN">
                 <a:solidFill>
                   <a:srgbClr val="14213D"/>
                 </a:solidFill>
@@ -3934,7 +4032,14 @@
           <a:bodyPr rtlCol="0" anchor="ctr"/>
           <a:lstStyle/>
           <a:p>
-            <a:pPr algn="ctr"/>
+            <a:pPr algn="ctr">
+              <a:spcBef>
+                <a:spcPts val="0"/>
+              </a:spcBef>
+              <a:spcAft>
+                <a:spcPts val="0"/>
+              </a:spcAft>
+            </a:pPr>
           </a:p>
         </p:txBody>
       </p:sp>
@@ -4016,8 +4121,8 @@
         </p:nvSpPr>
         <p:spPr>
           <a:xfrm>
-            <a:off x="876300" y="4356100"/>
-            <a:ext cx="1587500" cy="177800"/>
+            <a:off x="876300" y="4319587"/>
+            <a:ext cx="1587500" cy="250825"/>
           </a:xfrm>
           <a:prstGeom prst="rect">
             <a:avLst/>
@@ -4030,9 +4135,16 @@
           </a:bodyPr>
           <a:lstStyle/>
           <a:p>
-            <a:pPr algn="l"/>
-            <a:r>
-              <a:rPr sz="1500" b="1">
+            <a:pPr algn="l">
+              <a:spcBef>
+                <a:spcPts val="0"/>
+              </a:spcBef>
+              <a:spcAft>
+                <a:spcPts val="0"/>
+              </a:spcAft>
+            </a:pPr>
+            <a:r>
+              <a:rPr sz="1500" b="1" lang="zh-CN" altLang="zh-CN">
                 <a:solidFill>
                   <a:srgbClr val="0B3D91"/>
                 </a:solidFill>
@@ -4067,9 +4179,16 @@
           </a:bodyPr>
           <a:lstStyle/>
           <a:p>
-            <a:pPr algn="l"/>
-            <a:r>
-              <a:rPr sz="860" b="0">
+            <a:pPr algn="l">
+              <a:spcBef>
+                <a:spcPts val="0"/>
+              </a:spcBef>
+              <a:spcAft>
+                <a:spcPts val="0"/>
+              </a:spcAft>
+            </a:pPr>
+            <a:r>
+              <a:rPr sz="860" b="0" lang="zh-CN" altLang="zh-CN">
                 <a:solidFill>
                   <a:srgbClr val="14213D"/>
                 </a:solidFill>
@@ -4123,7 +4242,14 @@
           <a:bodyPr rtlCol="0" anchor="ctr"/>
           <a:lstStyle/>
           <a:p>
-            <a:pPr algn="ctr"/>
+            <a:pPr algn="ctr">
+              <a:spcBef>
+                <a:spcPts val="0"/>
+              </a:spcBef>
+              <a:spcAft>
+                <a:spcPts val="0"/>
+              </a:spcAft>
+            </a:pPr>
           </a:p>
         </p:txBody>
       </p:sp>
@@ -4135,8 +4261,8 @@
         </p:nvSpPr>
         <p:spPr>
           <a:xfrm>
-            <a:off x="3079750" y="1587500"/>
-            <a:ext cx="5994400" cy="203200"/>
+            <a:off x="3079750" y="1540827"/>
+            <a:ext cx="5994400" cy="296545"/>
           </a:xfrm>
           <a:prstGeom prst="rect">
             <a:avLst/>
@@ -4149,9 +4275,16 @@
           </a:bodyPr>
           <a:lstStyle/>
           <a:p>
-            <a:pPr algn="ctr"/>
-            <a:r>
-              <a:rPr sz="1800" b="1">
+            <a:pPr algn="ctr">
+              <a:spcBef>
+                <a:spcPts val="0"/>
+              </a:spcBef>
+              <a:spcAft>
+                <a:spcPts val="0"/>
+              </a:spcAft>
+            </a:pPr>
+            <a:r>
+              <a:rPr sz="1800" b="1" lang="zh-CN" altLang="zh-CN">
                 <a:solidFill>
                   <a:srgbClr val="0B3D91"/>
                 </a:solidFill>
@@ -4207,8 +4340,8 @@
         </p:nvSpPr>
         <p:spPr>
           <a:xfrm>
-            <a:off x="3213100" y="1854200"/>
-            <a:ext cx="685800" cy="152400"/>
+            <a:off x="3213100" y="1827847"/>
+            <a:ext cx="685800" cy="205104"/>
           </a:xfrm>
           <a:prstGeom prst="rect">
             <a:avLst/>
@@ -4221,9 +4354,16 @@
           </a:bodyPr>
           <a:lstStyle/>
           <a:p>
-            <a:pPr algn="ctr"/>
-            <a:r>
-              <a:rPr sz="1200" b="1">
+            <a:pPr algn="ctr">
+              <a:spcBef>
+                <a:spcPts val="0"/>
+              </a:spcBef>
+              <a:spcAft>
+                <a:spcPts val="0"/>
+              </a:spcAft>
+            </a:pPr>
+            <a:r>
+              <a:rPr sz="1200" b="1" lang="zh-CN" altLang="zh-CN">
                 <a:solidFill>
                   <a:srgbClr val="14213D"/>
                 </a:solidFill>
@@ -4258,9 +4398,16 @@
           </a:bodyPr>
           <a:lstStyle/>
           <a:p>
-            <a:pPr algn="ctr"/>
-            <a:r>
-              <a:rPr sz="1050" b="0">
+            <a:pPr algn="ctr">
+              <a:spcBef>
+                <a:spcPts val="0"/>
+              </a:spcBef>
+              <a:spcAft>
+                <a:spcPts val="0"/>
+              </a:spcAft>
+            </a:pPr>
+            <a:r>
+              <a:rPr sz="1050" b="0" lang="zh-CN" altLang="zh-CN">
                 <a:solidFill>
                   <a:srgbClr val="14213D"/>
                 </a:solidFill>
@@ -4314,7 +4461,14 @@
           <a:bodyPr rtlCol="0" anchor="ctr"/>
           <a:lstStyle/>
           <a:p>
-            <a:pPr algn="ctr"/>
+            <a:pPr algn="ctr">
+              <a:spcBef>
+                <a:spcPts val="0"/>
+              </a:spcBef>
+              <a:spcAft>
+                <a:spcPts val="0"/>
+              </a:spcAft>
+            </a:pPr>
           </a:p>
         </p:txBody>
       </p:sp>
@@ -4326,8 +4480,8 @@
         </p:nvSpPr>
         <p:spPr>
           <a:xfrm>
-            <a:off x="4546600" y="1854200"/>
-            <a:ext cx="685800" cy="152400"/>
+            <a:off x="4546600" y="1827847"/>
+            <a:ext cx="685800" cy="205104"/>
           </a:xfrm>
           <a:prstGeom prst="rect">
             <a:avLst/>
@@ -4340,9 +4494,16 @@
           </a:bodyPr>
           <a:lstStyle/>
           <a:p>
-            <a:pPr algn="ctr"/>
-            <a:r>
-              <a:rPr sz="1200" b="1">
+            <a:pPr algn="ctr">
+              <a:spcBef>
+                <a:spcPts val="0"/>
+              </a:spcBef>
+              <a:spcAft>
+                <a:spcPts val="0"/>
+              </a:spcAft>
+            </a:pPr>
+            <a:r>
+              <a:rPr sz="1200" b="1" lang="zh-CN" altLang="zh-CN">
                 <a:solidFill>
                   <a:srgbClr val="14213D"/>
                 </a:solidFill>
@@ -4377,9 +4538,16 @@
           </a:bodyPr>
           <a:lstStyle/>
           <a:p>
-            <a:pPr algn="ctr"/>
-            <a:r>
-              <a:rPr sz="1050" b="0">
+            <a:pPr algn="ctr">
+              <a:spcBef>
+                <a:spcPts val="0"/>
+              </a:spcBef>
+              <a:spcAft>
+                <a:spcPts val="0"/>
+              </a:spcAft>
+            </a:pPr>
+            <a:r>
+              <a:rPr sz="1050" b="0" lang="zh-CN" altLang="zh-CN">
                 <a:solidFill>
                   <a:srgbClr val="14213D"/>
                 </a:solidFill>
@@ -4433,7 +4601,14 @@
           <a:bodyPr rtlCol="0" anchor="ctr"/>
           <a:lstStyle/>
           <a:p>
-            <a:pPr algn="ctr"/>
+            <a:pPr algn="ctr">
+              <a:spcBef>
+                <a:spcPts val="0"/>
+              </a:spcBef>
+              <a:spcAft>
+                <a:spcPts val="0"/>
+              </a:spcAft>
+            </a:pPr>
           </a:p>
         </p:txBody>
       </p:sp>
@@ -4445,8 +4620,8 @@
         </p:nvSpPr>
         <p:spPr>
           <a:xfrm>
-            <a:off x="5880100" y="1854200"/>
-            <a:ext cx="685800" cy="152400"/>
+            <a:off x="5880100" y="1827847"/>
+            <a:ext cx="685800" cy="205104"/>
           </a:xfrm>
           <a:prstGeom prst="rect">
             <a:avLst/>
@@ -4459,9 +4634,16 @@
           </a:bodyPr>
           <a:lstStyle/>
           <a:p>
-            <a:pPr algn="ctr"/>
-            <a:r>
-              <a:rPr sz="1200" b="1">
+            <a:pPr algn="ctr">
+              <a:spcBef>
+                <a:spcPts val="0"/>
+              </a:spcBef>
+              <a:spcAft>
+                <a:spcPts val="0"/>
+              </a:spcAft>
+            </a:pPr>
+            <a:r>
+              <a:rPr sz="1200" b="1" lang="zh-CN" altLang="zh-CN">
                 <a:solidFill>
                   <a:srgbClr val="14213D"/>
                 </a:solidFill>
@@ -4496,9 +4678,16 @@
           </a:bodyPr>
           <a:lstStyle/>
           <a:p>
-            <a:pPr algn="ctr"/>
-            <a:r>
-              <a:rPr sz="1050" b="0">
+            <a:pPr algn="ctr">
+              <a:spcBef>
+                <a:spcPts val="0"/>
+              </a:spcBef>
+              <a:spcAft>
+                <a:spcPts val="0"/>
+              </a:spcAft>
+            </a:pPr>
+            <a:r>
+              <a:rPr sz="1050" b="0" lang="zh-CN" altLang="zh-CN">
                 <a:solidFill>
                   <a:srgbClr val="14213D"/>
                 </a:solidFill>
@@ -4552,7 +4741,14 @@
           <a:bodyPr rtlCol="0" anchor="ctr"/>
           <a:lstStyle/>
           <a:p>
-            <a:pPr algn="ctr"/>
+            <a:pPr algn="ctr">
+              <a:spcBef>
+                <a:spcPts val="0"/>
+              </a:spcBef>
+              <a:spcAft>
+                <a:spcPts val="0"/>
+              </a:spcAft>
+            </a:pPr>
           </a:p>
         </p:txBody>
       </p:sp>
@@ -4564,8 +4760,8 @@
         </p:nvSpPr>
         <p:spPr>
           <a:xfrm>
-            <a:off x="7213600" y="1854200"/>
-            <a:ext cx="685800" cy="152400"/>
+            <a:off x="7213600" y="1827847"/>
+            <a:ext cx="685800" cy="205104"/>
           </a:xfrm>
           <a:prstGeom prst="rect">
             <a:avLst/>
@@ -4578,9 +4774,16 @@
           </a:bodyPr>
           <a:lstStyle/>
           <a:p>
-            <a:pPr algn="ctr"/>
-            <a:r>
-              <a:rPr sz="1200" b="1">
+            <a:pPr algn="ctr">
+              <a:spcBef>
+                <a:spcPts val="0"/>
+              </a:spcBef>
+              <a:spcAft>
+                <a:spcPts val="0"/>
+              </a:spcAft>
+            </a:pPr>
+            <a:r>
+              <a:rPr sz="1200" b="1" lang="zh-CN" altLang="zh-CN">
                 <a:solidFill>
                   <a:srgbClr val="14213D"/>
                 </a:solidFill>
@@ -4615,9 +4818,16 @@
           </a:bodyPr>
           <a:lstStyle/>
           <a:p>
-            <a:pPr algn="ctr"/>
-            <a:r>
-              <a:rPr sz="1050" b="0">
+            <a:pPr algn="ctr">
+              <a:spcBef>
+                <a:spcPts val="0"/>
+              </a:spcBef>
+              <a:spcAft>
+                <a:spcPts val="0"/>
+              </a:spcAft>
+            </a:pPr>
+            <a:r>
+              <a:rPr sz="1050" b="0" lang="zh-CN" altLang="zh-CN">
                 <a:solidFill>
                   <a:srgbClr val="14213D"/>
                 </a:solidFill>
@@ -4671,7 +4881,14 @@
           <a:bodyPr rtlCol="0" anchor="ctr"/>
           <a:lstStyle/>
           <a:p>
-            <a:pPr algn="ctr"/>
+            <a:pPr algn="ctr">
+              <a:spcBef>
+                <a:spcPts val="0"/>
+              </a:spcBef>
+              <a:spcAft>
+                <a:spcPts val="0"/>
+              </a:spcAft>
+            </a:pPr>
           </a:p>
         </p:txBody>
       </p:sp>
@@ -4683,8 +4900,8 @@
         </p:nvSpPr>
         <p:spPr>
           <a:xfrm>
-            <a:off x="8547100" y="1854200"/>
-            <a:ext cx="685800" cy="152400"/>
+            <a:off x="8547100" y="1827847"/>
+            <a:ext cx="685800" cy="205104"/>
           </a:xfrm>
           <a:prstGeom prst="rect">
             <a:avLst/>
@@ -4697,9 +4914,16 @@
           </a:bodyPr>
           <a:lstStyle/>
           <a:p>
-            <a:pPr algn="ctr"/>
-            <a:r>
-              <a:rPr sz="1200" b="1">
+            <a:pPr algn="ctr">
+              <a:spcBef>
+                <a:spcPts val="0"/>
+              </a:spcBef>
+              <a:spcAft>
+                <a:spcPts val="0"/>
+              </a:spcAft>
+            </a:pPr>
+            <a:r>
+              <a:rPr sz="1200" b="1" lang="zh-CN" altLang="zh-CN">
                 <a:solidFill>
                   <a:srgbClr val="14213D"/>
                 </a:solidFill>
@@ -4734,9 +4958,16 @@
           </a:bodyPr>
           <a:lstStyle/>
           <a:p>
-            <a:pPr algn="ctr"/>
-            <a:r>
-              <a:rPr sz="1050" b="0">
+            <a:pPr algn="ctr">
+              <a:spcBef>
+                <a:spcPts val="0"/>
+              </a:spcBef>
+              <a:spcAft>
+                <a:spcPts val="0"/>
+              </a:spcAft>
+            </a:pPr>
+            <a:r>
+              <a:rPr sz="1050" b="0" lang="zh-CN" altLang="zh-CN">
                 <a:solidFill>
                   <a:srgbClr val="14213D"/>
                 </a:solidFill>
@@ -4790,7 +5021,14 @@
           <a:bodyPr rtlCol="0" anchor="ctr"/>
           <a:lstStyle/>
           <a:p>
-            <a:pPr algn="ctr"/>
+            <a:pPr algn="ctr">
+              <a:spcBef>
+                <a:spcPts val="0"/>
+              </a:spcBef>
+              <a:spcAft>
+                <a:spcPts val="0"/>
+              </a:spcAft>
+            </a:pPr>
           </a:p>
         </p:txBody>
       </p:sp>
@@ -4835,7 +5073,14 @@
           <a:bodyPr rtlCol="0" anchor="ctr"/>
           <a:lstStyle/>
           <a:p>
-            <a:pPr algn="ctr"/>
+            <a:pPr algn="ctr">
+              <a:spcBef>
+                <a:spcPts val="0"/>
+              </a:spcBef>
+              <a:spcAft>
+                <a:spcPts val="0"/>
+              </a:spcAft>
+            </a:pPr>
           </a:p>
         </p:txBody>
       </p:sp>
@@ -4847,8 +5092,8 @@
         </p:nvSpPr>
         <p:spPr>
           <a:xfrm>
-            <a:off x="3175000" y="2552700"/>
-            <a:ext cx="596900" cy="368300"/>
+            <a:off x="3175000" y="2527617"/>
+            <a:ext cx="596900" cy="418465"/>
           </a:xfrm>
           <a:prstGeom prst="rect">
             <a:avLst/>
@@ -4861,9 +5106,16 @@
           </a:bodyPr>
           <a:lstStyle/>
           <a:p>
-            <a:pPr algn="ctr"/>
-            <a:r>
-              <a:rPr sz="1300" b="1">
+            <a:pPr algn="ctr">
+              <a:spcBef>
+                <a:spcPts val="0"/>
+              </a:spcBef>
+              <a:spcAft>
+                <a:spcPts val="0"/>
+              </a:spcAft>
+            </a:pPr>
+            <a:r>
+              <a:rPr sz="1300" b="1" lang="zh-CN" altLang="zh-CN">
                 <a:solidFill>
                   <a:srgbClr val="FFFFFF"/>
                 </a:solidFill>
@@ -4917,7 +5169,14 @@
           <a:bodyPr rtlCol="0" anchor="ctr"/>
           <a:lstStyle/>
           <a:p>
-            <a:pPr algn="ctr"/>
+            <a:pPr algn="ctr">
+              <a:spcBef>
+                <a:spcPts val="0"/>
+              </a:spcBef>
+              <a:spcAft>
+                <a:spcPts val="0"/>
+              </a:spcAft>
+            </a:pPr>
           </a:p>
         </p:txBody>
       </p:sp>
@@ -4943,9 +5202,16 @@
           </a:bodyPr>
           <a:lstStyle/>
           <a:p>
-            <a:pPr algn="ctr"/>
-            <a:r>
-              <a:rPr sz="950" b="1">
+            <a:pPr algn="ctr">
+              <a:spcBef>
+                <a:spcPts val="0"/>
+              </a:spcBef>
+              <a:spcAft>
+                <a:spcPts val="0"/>
+              </a:spcAft>
+            </a:pPr>
+            <a:r>
+              <a:rPr sz="950" b="1" lang="zh-CN" altLang="zh-CN">
                 <a:solidFill>
                   <a:srgbClr val="0B3D91"/>
                 </a:solidFill>
@@ -4980,9 +5246,16 @@
           </a:bodyPr>
           <a:lstStyle/>
           <a:p>
-            <a:pPr algn="ctr"/>
-            <a:r>
-              <a:rPr sz="830" b="0">
+            <a:pPr algn="ctr">
+              <a:spcBef>
+                <a:spcPts val="0"/>
+              </a:spcBef>
+              <a:spcAft>
+                <a:spcPts val="0"/>
+              </a:spcAft>
+            </a:pPr>
+            <a:r>
+              <a:rPr sz="830" b="0" lang="zh-CN" altLang="zh-CN">
                 <a:solidFill>
                   <a:srgbClr val="14213D"/>
                 </a:solidFill>
@@ -5053,9 +5326,16 @@
           </a:bodyPr>
           <a:lstStyle/>
           <a:p>
-            <a:pPr algn="ctr"/>
-            <a:r>
-              <a:rPr sz="950" b="1">
+            <a:pPr algn="ctr">
+              <a:spcBef>
+                <a:spcPts val="0"/>
+              </a:spcBef>
+              <a:spcAft>
+                <a:spcPts val="0"/>
+              </a:spcAft>
+            </a:pPr>
+            <a:r>
+              <a:rPr sz="950" b="1" lang="zh-CN" altLang="zh-CN">
                 <a:solidFill>
                   <a:srgbClr val="0B3D91"/>
                 </a:solidFill>
@@ -5090,9 +5370,16 @@
           </a:bodyPr>
           <a:lstStyle/>
           <a:p>
-            <a:pPr algn="ctr"/>
-            <a:r>
-              <a:rPr sz="830" b="0">
+            <a:pPr algn="ctr">
+              <a:spcBef>
+                <a:spcPts val="0"/>
+              </a:spcBef>
+              <a:spcAft>
+                <a:spcPts val="0"/>
+              </a:spcAft>
+            </a:pPr>
+            <a:r>
+              <a:rPr sz="830" b="0" lang="zh-CN" altLang="zh-CN">
                 <a:solidFill>
                   <a:srgbClr val="14213D"/>
                 </a:solidFill>
@@ -5163,9 +5450,16 @@
           </a:bodyPr>
           <a:lstStyle/>
           <a:p>
-            <a:pPr algn="ctr"/>
-            <a:r>
-              <a:rPr sz="950" b="1">
+            <a:pPr algn="ctr">
+              <a:spcBef>
+                <a:spcPts val="0"/>
+              </a:spcBef>
+              <a:spcAft>
+                <a:spcPts val="0"/>
+              </a:spcAft>
+            </a:pPr>
+            <a:r>
+              <a:rPr sz="950" b="1" lang="zh-CN" altLang="zh-CN">
                 <a:solidFill>
                   <a:srgbClr val="0B3D91"/>
                 </a:solidFill>
@@ -5200,9 +5494,16 @@
           </a:bodyPr>
           <a:lstStyle/>
           <a:p>
-            <a:pPr algn="ctr"/>
-            <a:r>
-              <a:rPr sz="830" b="0">
+            <a:pPr algn="ctr">
+              <a:spcBef>
+                <a:spcPts val="0"/>
+              </a:spcBef>
+              <a:spcAft>
+                <a:spcPts val="0"/>
+              </a:spcAft>
+            </a:pPr>
+            <a:r>
+              <a:rPr sz="830" b="0" lang="zh-CN" altLang="zh-CN">
                 <a:solidFill>
                   <a:srgbClr val="14213D"/>
                 </a:solidFill>
@@ -5273,9 +5574,16 @@
           </a:bodyPr>
           <a:lstStyle/>
           <a:p>
-            <a:pPr algn="ctr"/>
-            <a:r>
-              <a:rPr sz="950" b="1">
+            <a:pPr algn="ctr">
+              <a:spcBef>
+                <a:spcPts val="0"/>
+              </a:spcBef>
+              <a:spcAft>
+                <a:spcPts val="0"/>
+              </a:spcAft>
+            </a:pPr>
+            <a:r>
+              <a:rPr sz="950" b="1" lang="zh-CN" altLang="zh-CN">
                 <a:solidFill>
                   <a:srgbClr val="0B3D91"/>
                 </a:solidFill>
@@ -5310,9 +5618,16 @@
           </a:bodyPr>
           <a:lstStyle/>
           <a:p>
-            <a:pPr algn="ctr"/>
-            <a:r>
-              <a:rPr sz="830" b="0">
+            <a:pPr algn="ctr">
+              <a:spcBef>
+                <a:spcPts val="0"/>
+              </a:spcBef>
+              <a:spcAft>
+                <a:spcPts val="0"/>
+              </a:spcAft>
+            </a:pPr>
+            <a:r>
+              <a:rPr sz="830" b="0" lang="zh-CN" altLang="zh-CN">
                 <a:solidFill>
                   <a:srgbClr val="14213D"/>
                 </a:solidFill>
@@ -5383,9 +5698,16 @@
           </a:bodyPr>
           <a:lstStyle/>
           <a:p>
-            <a:pPr algn="ctr"/>
-            <a:r>
-              <a:rPr sz="950" b="1">
+            <a:pPr algn="ctr">
+              <a:spcBef>
+                <a:spcPts val="0"/>
+              </a:spcBef>
+              <a:spcAft>
+                <a:spcPts val="0"/>
+              </a:spcAft>
+            </a:pPr>
+            <a:r>
+              <a:rPr sz="950" b="1" lang="zh-CN" altLang="zh-CN">
                 <a:solidFill>
                   <a:srgbClr val="0B3D91"/>
                 </a:solidFill>
@@ -5420,9 +5742,16 @@
           </a:bodyPr>
           <a:lstStyle/>
           <a:p>
-            <a:pPr algn="ctr"/>
-            <a:r>
-              <a:rPr sz="830" b="0">
+            <a:pPr algn="ctr">
+              <a:spcBef>
+                <a:spcPts val="0"/>
+              </a:spcBef>
+              <a:spcAft>
+                <a:spcPts val="0"/>
+              </a:spcAft>
+            </a:pPr>
+            <a:r>
+              <a:rPr sz="830" b="0" lang="zh-CN" altLang="zh-CN">
                 <a:solidFill>
                   <a:srgbClr val="14213D"/>
                 </a:solidFill>
@@ -5476,7 +5805,14 @@
           <a:bodyPr rtlCol="0" anchor="ctr"/>
           <a:lstStyle/>
           <a:p>
-            <a:pPr algn="ctr"/>
+            <a:pPr algn="ctr">
+              <a:spcBef>
+                <a:spcPts val="0"/>
+              </a:spcBef>
+              <a:spcAft>
+                <a:spcPts val="0"/>
+              </a:spcAft>
+            </a:pPr>
           </a:p>
         </p:txBody>
       </p:sp>
@@ -5488,8 +5824,8 @@
         </p:nvSpPr>
         <p:spPr>
           <a:xfrm>
-            <a:off x="3175000" y="3429000"/>
-            <a:ext cx="596900" cy="368300"/>
+            <a:off x="3175000" y="3403917"/>
+            <a:ext cx="596900" cy="418465"/>
           </a:xfrm>
           <a:prstGeom prst="rect">
             <a:avLst/>
@@ -5502,9 +5838,16 @@
           </a:bodyPr>
           <a:lstStyle/>
           <a:p>
-            <a:pPr algn="ctr"/>
-            <a:r>
-              <a:rPr sz="1300" b="1">
+            <a:pPr algn="ctr">
+              <a:spcBef>
+                <a:spcPts val="0"/>
+              </a:spcBef>
+              <a:spcAft>
+                <a:spcPts val="0"/>
+              </a:spcAft>
+            </a:pPr>
+            <a:r>
+              <a:rPr sz="1300" b="1" lang="zh-CN" altLang="zh-CN">
                 <a:solidFill>
                   <a:srgbClr val="FFFFFF"/>
                 </a:solidFill>
@@ -5558,7 +5901,14 @@
           <a:bodyPr rtlCol="0" anchor="ctr"/>
           <a:lstStyle/>
           <a:p>
-            <a:pPr algn="ctr"/>
+            <a:pPr algn="ctr">
+              <a:spcBef>
+                <a:spcPts val="0"/>
+              </a:spcBef>
+              <a:spcAft>
+                <a:spcPts val="0"/>
+              </a:spcAft>
+            </a:pPr>
           </a:p>
         </p:txBody>
       </p:sp>
@@ -5584,9 +5934,16 @@
           </a:bodyPr>
           <a:lstStyle/>
           <a:p>
-            <a:pPr algn="ctr"/>
-            <a:r>
-              <a:rPr sz="950" b="1">
+            <a:pPr algn="ctr">
+              <a:spcBef>
+                <a:spcPts val="0"/>
+              </a:spcBef>
+              <a:spcAft>
+                <a:spcPts val="0"/>
+              </a:spcAft>
+            </a:pPr>
+            <a:r>
+              <a:rPr sz="950" b="1" lang="zh-CN" altLang="zh-CN">
                 <a:solidFill>
                   <a:srgbClr val="0B3D91"/>
                 </a:solidFill>
@@ -5621,9 +5978,16 @@
           </a:bodyPr>
           <a:lstStyle/>
           <a:p>
-            <a:pPr algn="ctr"/>
-            <a:r>
-              <a:rPr sz="830" b="0">
+            <a:pPr algn="ctr">
+              <a:spcBef>
+                <a:spcPts val="0"/>
+              </a:spcBef>
+              <a:spcAft>
+                <a:spcPts val="0"/>
+              </a:spcAft>
+            </a:pPr>
+            <a:r>
+              <a:rPr sz="830" b="0" lang="zh-CN" altLang="zh-CN">
                 <a:solidFill>
                   <a:srgbClr val="14213D"/>
                 </a:solidFill>
@@ -5694,9 +6058,16 @@
           </a:bodyPr>
           <a:lstStyle/>
           <a:p>
-            <a:pPr algn="ctr"/>
-            <a:r>
-              <a:rPr sz="950" b="1">
+            <a:pPr algn="ctr">
+              <a:spcBef>
+                <a:spcPts val="0"/>
+              </a:spcBef>
+              <a:spcAft>
+                <a:spcPts val="0"/>
+              </a:spcAft>
+            </a:pPr>
+            <a:r>
+              <a:rPr sz="950" b="1" lang="zh-CN" altLang="zh-CN">
                 <a:solidFill>
                   <a:srgbClr val="0B3D91"/>
                 </a:solidFill>
@@ -5731,9 +6102,16 @@
           </a:bodyPr>
           <a:lstStyle/>
           <a:p>
-            <a:pPr algn="ctr"/>
-            <a:r>
-              <a:rPr sz="830" b="0">
+            <a:pPr algn="ctr">
+              <a:spcBef>
+                <a:spcPts val="0"/>
+              </a:spcBef>
+              <a:spcAft>
+                <a:spcPts val="0"/>
+              </a:spcAft>
+            </a:pPr>
+            <a:r>
+              <a:rPr sz="830" b="0" lang="zh-CN" altLang="zh-CN">
                 <a:solidFill>
                   <a:srgbClr val="14213D"/>
                 </a:solidFill>
@@ -5804,9 +6182,16 @@
           </a:bodyPr>
           <a:lstStyle/>
           <a:p>
-            <a:pPr algn="ctr"/>
-            <a:r>
-              <a:rPr sz="950" b="1">
+            <a:pPr algn="ctr">
+              <a:spcBef>
+                <a:spcPts val="0"/>
+              </a:spcBef>
+              <a:spcAft>
+                <a:spcPts val="0"/>
+              </a:spcAft>
+            </a:pPr>
+            <a:r>
+              <a:rPr sz="950" b="1" lang="zh-CN" altLang="zh-CN">
                 <a:solidFill>
                   <a:srgbClr val="0B3D91"/>
                 </a:solidFill>
@@ -5841,9 +6226,16 @@
           </a:bodyPr>
           <a:lstStyle/>
           <a:p>
-            <a:pPr algn="ctr"/>
-            <a:r>
-              <a:rPr sz="830" b="0">
+            <a:pPr algn="ctr">
+              <a:spcBef>
+                <a:spcPts val="0"/>
+              </a:spcBef>
+              <a:spcAft>
+                <a:spcPts val="0"/>
+              </a:spcAft>
+            </a:pPr>
+            <a:r>
+              <a:rPr sz="830" b="0" lang="zh-CN" altLang="zh-CN">
                 <a:solidFill>
                   <a:srgbClr val="14213D"/>
                 </a:solidFill>
@@ -5914,9 +6306,16 @@
           </a:bodyPr>
           <a:lstStyle/>
           <a:p>
-            <a:pPr algn="ctr"/>
-            <a:r>
-              <a:rPr sz="950" b="1">
+            <a:pPr algn="ctr">
+              <a:spcBef>
+                <a:spcPts val="0"/>
+              </a:spcBef>
+              <a:spcAft>
+                <a:spcPts val="0"/>
+              </a:spcAft>
+            </a:pPr>
+            <a:r>
+              <a:rPr sz="950" b="1" lang="zh-CN" altLang="zh-CN">
                 <a:solidFill>
                   <a:srgbClr val="0B3D91"/>
                 </a:solidFill>
@@ -5951,9 +6350,16 @@
           </a:bodyPr>
           <a:lstStyle/>
           <a:p>
-            <a:pPr algn="ctr"/>
-            <a:r>
-              <a:rPr sz="830" b="0">
+            <a:pPr algn="ctr">
+              <a:spcBef>
+                <a:spcPts val="0"/>
+              </a:spcBef>
+              <a:spcAft>
+                <a:spcPts val="0"/>
+              </a:spcAft>
+            </a:pPr>
+            <a:r>
+              <a:rPr sz="830" b="0" lang="zh-CN" altLang="zh-CN">
                 <a:solidFill>
                   <a:srgbClr val="14213D"/>
                 </a:solidFill>
@@ -6024,9 +6430,16 @@
           </a:bodyPr>
           <a:lstStyle/>
           <a:p>
-            <a:pPr algn="ctr"/>
-            <a:r>
-              <a:rPr sz="950" b="1">
+            <a:pPr algn="ctr">
+              <a:spcBef>
+                <a:spcPts val="0"/>
+              </a:spcBef>
+              <a:spcAft>
+                <a:spcPts val="0"/>
+              </a:spcAft>
+            </a:pPr>
+            <a:r>
+              <a:rPr sz="950" b="1" lang="zh-CN" altLang="zh-CN">
                 <a:solidFill>
                   <a:srgbClr val="0B3D91"/>
                 </a:solidFill>
@@ -6061,9 +6474,16 @@
           </a:bodyPr>
           <a:lstStyle/>
           <a:p>
-            <a:pPr algn="ctr"/>
-            <a:r>
-              <a:rPr sz="830" b="0">
+            <a:pPr algn="ctr">
+              <a:spcBef>
+                <a:spcPts val="0"/>
+              </a:spcBef>
+              <a:spcAft>
+                <a:spcPts val="0"/>
+              </a:spcAft>
+            </a:pPr>
+            <a:r>
+              <a:rPr sz="830" b="0" lang="zh-CN" altLang="zh-CN">
                 <a:solidFill>
                   <a:srgbClr val="14213D"/>
                 </a:solidFill>
@@ -6117,7 +6537,14 @@
           <a:bodyPr rtlCol="0" anchor="ctr"/>
           <a:lstStyle/>
           <a:p>
-            <a:pPr algn="ctr"/>
+            <a:pPr algn="ctr">
+              <a:spcBef>
+                <a:spcPts val="0"/>
+              </a:spcBef>
+              <a:spcAft>
+                <a:spcPts val="0"/>
+              </a:spcAft>
+            </a:pPr>
           </a:p>
         </p:txBody>
       </p:sp>
@@ -6129,8 +6556,8 @@
         </p:nvSpPr>
         <p:spPr>
           <a:xfrm>
-            <a:off x="3175000" y="4305300"/>
-            <a:ext cx="596900" cy="368300"/>
+            <a:off x="3175000" y="4280217"/>
+            <a:ext cx="596900" cy="418465"/>
           </a:xfrm>
           <a:prstGeom prst="rect">
             <a:avLst/>
@@ -6143,9 +6570,16 @@
           </a:bodyPr>
           <a:lstStyle/>
           <a:p>
-            <a:pPr algn="ctr"/>
-            <a:r>
-              <a:rPr sz="1300" b="1">
+            <a:pPr algn="ctr">
+              <a:spcBef>
+                <a:spcPts val="0"/>
+              </a:spcBef>
+              <a:spcAft>
+                <a:spcPts val="0"/>
+              </a:spcAft>
+            </a:pPr>
+            <a:r>
+              <a:rPr sz="1300" b="1" lang="zh-CN" altLang="zh-CN">
                 <a:solidFill>
                   <a:srgbClr val="FFFFFF"/>
                 </a:solidFill>
@@ -6199,7 +6633,14 @@
           <a:bodyPr rtlCol="0" anchor="ctr"/>
           <a:lstStyle/>
           <a:p>
-            <a:pPr algn="ctr"/>
+            <a:pPr algn="ctr">
+              <a:spcBef>
+                <a:spcPts val="0"/>
+              </a:spcBef>
+              <a:spcAft>
+                <a:spcPts val="0"/>
+              </a:spcAft>
+            </a:pPr>
           </a:p>
         </p:txBody>
       </p:sp>
@@ -6225,9 +6666,16 @@
           </a:bodyPr>
           <a:lstStyle/>
           <a:p>
-            <a:pPr algn="ctr"/>
-            <a:r>
-              <a:rPr sz="950" b="1">
+            <a:pPr algn="ctr">
+              <a:spcBef>
+                <a:spcPts val="0"/>
+              </a:spcBef>
+              <a:spcAft>
+                <a:spcPts val="0"/>
+              </a:spcAft>
+            </a:pPr>
+            <a:r>
+              <a:rPr sz="950" b="1" lang="zh-CN" altLang="zh-CN">
                 <a:solidFill>
                   <a:srgbClr val="0B3D91"/>
                 </a:solidFill>
@@ -6262,9 +6710,16 @@
           </a:bodyPr>
           <a:lstStyle/>
           <a:p>
-            <a:pPr algn="ctr"/>
-            <a:r>
-              <a:rPr sz="830" b="0">
+            <a:pPr algn="ctr">
+              <a:spcBef>
+                <a:spcPts val="0"/>
+              </a:spcBef>
+              <a:spcAft>
+                <a:spcPts val="0"/>
+              </a:spcAft>
+            </a:pPr>
+            <a:r>
+              <a:rPr sz="830" b="0" lang="zh-CN" altLang="zh-CN">
                 <a:solidFill>
                   <a:srgbClr val="14213D"/>
                 </a:solidFill>
@@ -6335,9 +6790,16 @@
           </a:bodyPr>
           <a:lstStyle/>
           <a:p>
-            <a:pPr algn="ctr"/>
-            <a:r>
-              <a:rPr sz="950" b="1">
+            <a:pPr algn="ctr">
+              <a:spcBef>
+                <a:spcPts val="0"/>
+              </a:spcBef>
+              <a:spcAft>
+                <a:spcPts val="0"/>
+              </a:spcAft>
+            </a:pPr>
+            <a:r>
+              <a:rPr sz="950" b="1" lang="zh-CN" altLang="zh-CN">
                 <a:solidFill>
                   <a:srgbClr val="0B3D91"/>
                 </a:solidFill>
@@ -6372,9 +6834,16 @@
           </a:bodyPr>
           <a:lstStyle/>
           <a:p>
-            <a:pPr algn="ctr"/>
-            <a:r>
-              <a:rPr sz="830" b="0">
+            <a:pPr algn="ctr">
+              <a:spcBef>
+                <a:spcPts val="0"/>
+              </a:spcBef>
+              <a:spcAft>
+                <a:spcPts val="0"/>
+              </a:spcAft>
+            </a:pPr>
+            <a:r>
+              <a:rPr sz="830" b="0" lang="zh-CN" altLang="zh-CN">
                 <a:solidFill>
                   <a:srgbClr val="14213D"/>
                 </a:solidFill>
@@ -6445,9 +6914,16 @@
           </a:bodyPr>
           <a:lstStyle/>
           <a:p>
-            <a:pPr algn="ctr"/>
-            <a:r>
-              <a:rPr sz="950" b="1">
+            <a:pPr algn="ctr">
+              <a:spcBef>
+                <a:spcPts val="0"/>
+              </a:spcBef>
+              <a:spcAft>
+                <a:spcPts val="0"/>
+              </a:spcAft>
+            </a:pPr>
+            <a:r>
+              <a:rPr sz="950" b="1" lang="zh-CN" altLang="zh-CN">
                 <a:solidFill>
                   <a:srgbClr val="0B3D91"/>
                 </a:solidFill>
@@ -6482,9 +6958,16 @@
           </a:bodyPr>
           <a:lstStyle/>
           <a:p>
-            <a:pPr algn="ctr"/>
-            <a:r>
-              <a:rPr sz="830" b="0">
+            <a:pPr algn="ctr">
+              <a:spcBef>
+                <a:spcPts val="0"/>
+              </a:spcBef>
+              <a:spcAft>
+                <a:spcPts val="0"/>
+              </a:spcAft>
+            </a:pPr>
+            <a:r>
+              <a:rPr sz="830" b="0" lang="zh-CN" altLang="zh-CN">
                 <a:solidFill>
                   <a:srgbClr val="14213D"/>
                 </a:solidFill>
@@ -6555,9 +7038,16 @@
           </a:bodyPr>
           <a:lstStyle/>
           <a:p>
-            <a:pPr algn="ctr"/>
-            <a:r>
-              <a:rPr sz="950" b="1">
+            <a:pPr algn="ctr">
+              <a:spcBef>
+                <a:spcPts val="0"/>
+              </a:spcBef>
+              <a:spcAft>
+                <a:spcPts val="0"/>
+              </a:spcAft>
+            </a:pPr>
+            <a:r>
+              <a:rPr sz="950" b="1" lang="zh-CN" altLang="zh-CN">
                 <a:solidFill>
                   <a:srgbClr val="0B3D91"/>
                 </a:solidFill>
@@ -6592,9 +7082,16 @@
           </a:bodyPr>
           <a:lstStyle/>
           <a:p>
-            <a:pPr algn="ctr"/>
-            <a:r>
-              <a:rPr sz="830" b="0">
+            <a:pPr algn="ctr">
+              <a:spcBef>
+                <a:spcPts val="0"/>
+              </a:spcBef>
+              <a:spcAft>
+                <a:spcPts val="0"/>
+              </a:spcAft>
+            </a:pPr>
+            <a:r>
+              <a:rPr sz="830" b="0" lang="zh-CN" altLang="zh-CN">
                 <a:solidFill>
                   <a:srgbClr val="14213D"/>
                 </a:solidFill>
@@ -6665,9 +7162,16 @@
           </a:bodyPr>
           <a:lstStyle/>
           <a:p>
-            <a:pPr algn="ctr"/>
-            <a:r>
-              <a:rPr sz="950" b="1">
+            <a:pPr algn="ctr">
+              <a:spcBef>
+                <a:spcPts val="0"/>
+              </a:spcBef>
+              <a:spcAft>
+                <a:spcPts val="0"/>
+              </a:spcAft>
+            </a:pPr>
+            <a:r>
+              <a:rPr sz="950" b="1" lang="zh-CN" altLang="zh-CN">
                 <a:solidFill>
                   <a:srgbClr val="0B3D91"/>
                 </a:solidFill>
@@ -6702,9 +7206,16 @@
           </a:bodyPr>
           <a:lstStyle/>
           <a:p>
-            <a:pPr algn="ctr"/>
-            <a:r>
-              <a:rPr sz="830" b="0">
+            <a:pPr algn="ctr">
+              <a:spcBef>
+                <a:spcPts val="0"/>
+              </a:spcBef>
+              <a:spcAft>
+                <a:spcPts val="0"/>
+              </a:spcAft>
+            </a:pPr>
+            <a:r>
+              <a:rPr sz="830" b="0" lang="zh-CN" altLang="zh-CN">
                 <a:solidFill>
                   <a:srgbClr val="14213D"/>
                 </a:solidFill>
@@ -6758,7 +7269,14 @@
           <a:bodyPr rtlCol="0" anchor="ctr"/>
           <a:lstStyle/>
           <a:p>
-            <a:pPr algn="ctr"/>
+            <a:pPr algn="ctr">
+              <a:spcBef>
+                <a:spcPts val="0"/>
+              </a:spcBef>
+              <a:spcAft>
+                <a:spcPts val="0"/>
+              </a:spcAft>
+            </a:pPr>
           </a:p>
         </p:txBody>
       </p:sp>
@@ -6784,9 +7302,16 @@
           </a:bodyPr>
           <a:lstStyle/>
           <a:p>
-            <a:pPr algn="l"/>
-            <a:r>
-              <a:rPr sz="1150" b="1">
+            <a:pPr algn="l">
+              <a:spcBef>
+                <a:spcPts val="0"/>
+              </a:spcBef>
+              <a:spcAft>
+                <a:spcPts val="0"/>
+              </a:spcAft>
+            </a:pPr>
+            <a:r>
+              <a:rPr sz="1150" b="1" lang="zh-CN" altLang="zh-CN">
                 <a:solidFill>
                   <a:srgbClr val="0B3D91"/>
                 </a:solidFill>
@@ -6840,7 +7365,14 @@
           <a:bodyPr rtlCol="0" anchor="ctr"/>
           <a:lstStyle/>
           <a:p>
-            <a:pPr algn="ctr"/>
+            <a:pPr algn="ctr">
+              <a:spcBef>
+                <a:spcPts val="0"/>
+              </a:spcBef>
+              <a:spcAft>
+                <a:spcPts val="0"/>
+              </a:spcAft>
+            </a:pPr>
           </a:p>
         </p:txBody>
       </p:sp>
@@ -6885,7 +7417,14 @@
           <a:bodyPr rtlCol="0" anchor="ctr"/>
           <a:lstStyle/>
           <a:p>
-            <a:pPr algn="ctr"/>
+            <a:pPr algn="ctr">
+              <a:spcBef>
+                <a:spcPts val="0"/>
+              </a:spcBef>
+              <a:spcAft>
+                <a:spcPts val="0"/>
+              </a:spcAft>
+            </a:pPr>
           </a:p>
         </p:txBody>
       </p:sp>
@@ -6897,8 +7436,8 @@
         </p:nvSpPr>
         <p:spPr>
           <a:xfrm>
-            <a:off x="9690100" y="1568450"/>
-            <a:ext cx="2120900" cy="190500"/>
+            <a:off x="9690100" y="1523047"/>
+            <a:ext cx="2120900" cy="281305"/>
           </a:xfrm>
           <a:prstGeom prst="rect">
             <a:avLst/>
@@ -6911,9 +7450,16 @@
           </a:bodyPr>
           <a:lstStyle/>
           <a:p>
-            <a:pPr algn="ctr"/>
-            <a:r>
-              <a:rPr sz="1700" b="1">
+            <a:pPr algn="ctr">
+              <a:spcBef>
+                <a:spcPts val="0"/>
+              </a:spcBef>
+              <a:spcAft>
+                <a:spcPts val="0"/>
+              </a:spcAft>
+            </a:pPr>
+            <a:r>
+              <a:rPr sz="1700" b="1" lang="zh-CN" altLang="zh-CN">
                 <a:solidFill>
                   <a:srgbClr val="FFFFFF"/>
                 </a:solidFill>
@@ -6967,7 +7513,14 @@
           <a:bodyPr rtlCol="0" anchor="ctr"/>
           <a:lstStyle/>
           <a:p>
-            <a:pPr algn="ctr"/>
+            <a:pPr algn="ctr">
+              <a:spcBef>
+                <a:spcPts val="0"/>
+              </a:spcBef>
+              <a:spcAft>
+                <a:spcPts val="0"/>
+              </a:spcAft>
+            </a:pPr>
           </a:p>
         </p:txBody>
       </p:sp>
@@ -7049,8 +7602,8 @@
         </p:nvSpPr>
         <p:spPr>
           <a:xfrm>
-            <a:off x="10236200" y="2095500"/>
-            <a:ext cx="1397000" cy="190500"/>
+            <a:off x="10236200" y="2065337"/>
+            <a:ext cx="1397000" cy="250825"/>
           </a:xfrm>
           <a:prstGeom prst="rect">
             <a:avLst/>
@@ -7063,9 +7616,16 @@
           </a:bodyPr>
           <a:lstStyle/>
           <a:p>
-            <a:pPr algn="l"/>
-            <a:r>
-              <a:rPr sz="1500" b="1">
+            <a:pPr algn="l">
+              <a:spcBef>
+                <a:spcPts val="0"/>
+              </a:spcBef>
+              <a:spcAft>
+                <a:spcPts val="0"/>
+              </a:spcAft>
+            </a:pPr>
+            <a:r>
+              <a:rPr sz="1500" b="1" lang="zh-CN" altLang="zh-CN">
                 <a:solidFill>
                   <a:srgbClr val="008C95"/>
                 </a:solidFill>
@@ -7100,9 +7660,16 @@
           </a:bodyPr>
           <a:lstStyle/>
           <a:p>
-            <a:pPr algn="l"/>
-            <a:r>
-              <a:rPr sz="900" b="0">
+            <a:pPr algn="l">
+              <a:spcBef>
+                <a:spcPts val="0"/>
+              </a:spcBef>
+              <a:spcAft>
+                <a:spcPts val="0"/>
+              </a:spcAft>
+            </a:pPr>
+            <a:r>
+              <a:rPr sz="900" b="0" lang="zh-CN" altLang="zh-CN">
                 <a:solidFill>
                   <a:srgbClr val="14213D"/>
                 </a:solidFill>
@@ -7137,9 +7704,16 @@
           </a:bodyPr>
           <a:lstStyle/>
           <a:p>
-            <a:pPr algn="ctr"/>
-            <a:r>
-              <a:rPr sz="1000" b="1">
+            <a:pPr algn="ctr">
+              <a:spcBef>
+                <a:spcPts val="0"/>
+              </a:spcBef>
+              <a:spcAft>
+                <a:spcPts val="0"/>
+              </a:spcAft>
+            </a:pPr>
+            <a:r>
+              <a:rPr sz="1000" b="1" lang="zh-CN" altLang="zh-CN">
                 <a:solidFill>
                   <a:srgbClr val="008C95"/>
                 </a:solidFill>
@@ -7193,7 +7767,14 @@
           <a:bodyPr rtlCol="0" anchor="ctr"/>
           <a:lstStyle/>
           <a:p>
-            <a:pPr algn="ctr"/>
+            <a:pPr algn="ctr">
+              <a:spcBef>
+                <a:spcPts val="0"/>
+              </a:spcBef>
+              <a:spcAft>
+                <a:spcPts val="0"/>
+              </a:spcAft>
+            </a:pPr>
           </a:p>
         </p:txBody>
       </p:sp>
@@ -7275,8 +7856,8 @@
         </p:nvSpPr>
         <p:spPr>
           <a:xfrm>
-            <a:off x="10236200" y="3683000"/>
-            <a:ext cx="1397000" cy="190500"/>
+            <a:off x="10236200" y="3652837"/>
+            <a:ext cx="1397000" cy="250825"/>
           </a:xfrm>
           <a:prstGeom prst="rect">
             <a:avLst/>
@@ -7289,9 +7870,16 @@
           </a:bodyPr>
           <a:lstStyle/>
           <a:p>
-            <a:pPr algn="l"/>
-            <a:r>
-              <a:rPr sz="1500" b="1">
+            <a:pPr algn="l">
+              <a:spcBef>
+                <a:spcPts val="0"/>
+              </a:spcBef>
+              <a:spcAft>
+                <a:spcPts val="0"/>
+              </a:spcAft>
+            </a:pPr>
+            <a:r>
+              <a:rPr sz="1500" b="1" lang="zh-CN" altLang="zh-CN">
                 <a:solidFill>
                   <a:srgbClr val="F97316"/>
                 </a:solidFill>
@@ -7326,9 +7914,16 @@
           </a:bodyPr>
           <a:lstStyle/>
           <a:p>
-            <a:pPr algn="l"/>
-            <a:r>
-              <a:rPr sz="900" b="0">
+            <a:pPr algn="l">
+              <a:spcBef>
+                <a:spcPts val="0"/>
+              </a:spcBef>
+              <a:spcAft>
+                <a:spcPts val="0"/>
+              </a:spcAft>
+            </a:pPr>
+            <a:r>
+              <a:rPr sz="900" b="0" lang="zh-CN" altLang="zh-CN">
                 <a:solidFill>
                   <a:srgbClr val="14213D"/>
                 </a:solidFill>
@@ -7363,9 +7958,16 @@
           </a:bodyPr>
           <a:lstStyle/>
           <a:p>
-            <a:pPr algn="ctr"/>
-            <a:r>
-              <a:rPr sz="1000" b="1">
+            <a:pPr algn="ctr">
+              <a:spcBef>
+                <a:spcPts val="0"/>
+              </a:spcBef>
+              <a:spcAft>
+                <a:spcPts val="0"/>
+              </a:spcAft>
+            </a:pPr>
+            <a:r>
+              <a:rPr sz="1000" b="1" lang="zh-CN" altLang="zh-CN">
                 <a:solidFill>
                   <a:srgbClr val="008C95"/>
                 </a:solidFill>
@@ -7419,7 +8021,14 @@
           <a:bodyPr rtlCol="0" anchor="ctr"/>
           <a:lstStyle/>
           <a:p>
-            <a:pPr algn="ctr"/>
+            <a:pPr algn="ctr">
+              <a:spcBef>
+                <a:spcPts val="0"/>
+              </a:spcBef>
+              <a:spcAft>
+                <a:spcPts val="0"/>
+              </a:spcAft>
+            </a:pPr>
           </a:p>
         </p:txBody>
       </p:sp>
@@ -7445,9 +8054,16 @@
           </a:bodyPr>
           <a:lstStyle/>
           <a:p>
-            <a:pPr algn="l"/>
-            <a:r>
-              <a:rPr sz="1600" b="1">
+            <a:pPr algn="l">
+              <a:spcBef>
+                <a:spcPts val="0"/>
+              </a:spcBef>
+              <a:spcAft>
+                <a:spcPts val="0"/>
+              </a:spcAft>
+            </a:pPr>
+            <a:r>
+              <a:rPr sz="1600" b="1" lang="zh-CN" altLang="zh-CN">
                 <a:solidFill>
                   <a:srgbClr val="0B3D91"/>
                 </a:solidFill>
@@ -7536,7 +8152,14 @@
           <a:bodyPr rtlCol="0" anchor="ctr"/>
           <a:lstStyle/>
           <a:p>
-            <a:pPr algn="ctr"/>
+            <a:pPr algn="ctr">
+              <a:spcBef>
+                <a:spcPts val="0"/>
+              </a:spcBef>
+              <a:spcAft>
+                <a:spcPts val="0"/>
+              </a:spcAft>
+            </a:pPr>
           </a:p>
         </p:txBody>
       </p:sp>
@@ -7632,9 +8255,16 @@
           </a:bodyPr>
           <a:lstStyle/>
           <a:p>
-            <a:pPr algn="l"/>
-            <a:r>
-              <a:rPr sz="1050" b="1">
+            <a:pPr algn="l">
+              <a:spcBef>
+                <a:spcPts val="0"/>
+              </a:spcBef>
+              <a:spcAft>
+                <a:spcPts val="0"/>
+              </a:spcAft>
+            </a:pPr>
+            <a:r>
+              <a:rPr sz="1050" b="1" lang="zh-CN" altLang="zh-CN">
                 <a:solidFill>
                   <a:srgbClr val="0B3D91"/>
                 </a:solidFill>
@@ -7655,8 +8285,8 @@
         </p:nvSpPr>
         <p:spPr>
           <a:xfrm>
-            <a:off x="2933700" y="5880100"/>
-            <a:ext cx="1295400" cy="215900"/>
+            <a:off x="2933700" y="5839777"/>
+            <a:ext cx="1295400" cy="296545"/>
           </a:xfrm>
           <a:prstGeom prst="rect">
             <a:avLst/>
@@ -7669,9 +8299,16 @@
           </a:bodyPr>
           <a:lstStyle/>
           <a:p>
-            <a:pPr algn="l"/>
-            <a:r>
-              <a:rPr sz="1800" b="1">
+            <a:pPr algn="l">
+              <a:spcBef>
+                <a:spcPts val="0"/>
+              </a:spcBef>
+              <a:spcAft>
+                <a:spcPts val="0"/>
+              </a:spcAft>
+            </a:pPr>
+            <a:r>
+              <a:rPr sz="1800" b="1" lang="zh-CN" altLang="zh-CN">
                 <a:solidFill>
                   <a:srgbClr val="0B3D91"/>
                 </a:solidFill>
@@ -7706,9 +8343,16 @@
           </a:bodyPr>
           <a:lstStyle/>
           <a:p>
-            <a:pPr algn="l"/>
-            <a:r>
-              <a:rPr sz="950" b="0">
+            <a:pPr algn="l">
+              <a:spcBef>
+                <a:spcPts val="0"/>
+              </a:spcBef>
+              <a:spcAft>
+                <a:spcPts val="0"/>
+              </a:spcAft>
+            </a:pPr>
+            <a:r>
+              <a:rPr sz="950" b="0" lang="zh-CN" altLang="zh-CN">
                 <a:solidFill>
                   <a:srgbClr val="14213D"/>
                 </a:solidFill>
@@ -7797,7 +8441,14 @@
           <a:bodyPr rtlCol="0" anchor="ctr"/>
           <a:lstStyle/>
           <a:p>
-            <a:pPr algn="ctr"/>
+            <a:pPr algn="ctr">
+              <a:spcBef>
+                <a:spcPts val="0"/>
+              </a:spcBef>
+              <a:spcAft>
+                <a:spcPts val="0"/>
+              </a:spcAft>
+            </a:pPr>
           </a:p>
         </p:txBody>
       </p:sp>
@@ -7893,9 +8544,16 @@
           </a:bodyPr>
           <a:lstStyle/>
           <a:p>
-            <a:pPr algn="l"/>
-            <a:r>
-              <a:rPr sz="1050" b="1">
+            <a:pPr algn="l">
+              <a:spcBef>
+                <a:spcPts val="0"/>
+              </a:spcBef>
+              <a:spcAft>
+                <a:spcPts val="0"/>
+              </a:spcAft>
+            </a:pPr>
+            <a:r>
+              <a:rPr sz="1050" b="1" lang="zh-CN" altLang="zh-CN">
                 <a:solidFill>
                   <a:srgbClr val="0B3D91"/>
                 </a:solidFill>
@@ -7916,8 +8574,8 @@
         </p:nvSpPr>
         <p:spPr>
           <a:xfrm>
-            <a:off x="5029200" y="5880100"/>
-            <a:ext cx="1295400" cy="215900"/>
+            <a:off x="5029200" y="5839777"/>
+            <a:ext cx="1295400" cy="296545"/>
           </a:xfrm>
           <a:prstGeom prst="rect">
             <a:avLst/>
@@ -7930,9 +8588,16 @@
           </a:bodyPr>
           <a:lstStyle/>
           <a:p>
-            <a:pPr algn="l"/>
-            <a:r>
-              <a:rPr sz="1800" b="1">
+            <a:pPr algn="l">
+              <a:spcBef>
+                <a:spcPts val="0"/>
+              </a:spcBef>
+              <a:spcAft>
+                <a:spcPts val="0"/>
+              </a:spcAft>
+            </a:pPr>
+            <a:r>
+              <a:rPr sz="1800" b="1" lang="zh-CN" altLang="zh-CN">
                 <a:solidFill>
                   <a:srgbClr val="008C95"/>
                 </a:solidFill>
@@ -7967,9 +8632,16 @@
           </a:bodyPr>
           <a:lstStyle/>
           <a:p>
-            <a:pPr algn="l"/>
-            <a:r>
-              <a:rPr sz="950" b="0">
+            <a:pPr algn="l">
+              <a:spcBef>
+                <a:spcPts val="0"/>
+              </a:spcBef>
+              <a:spcAft>
+                <a:spcPts val="0"/>
+              </a:spcAft>
+            </a:pPr>
+            <a:r>
+              <a:rPr sz="950" b="0" lang="zh-CN" altLang="zh-CN">
                 <a:solidFill>
                   <a:srgbClr val="14213D"/>
                 </a:solidFill>
@@ -8058,7 +8730,14 @@
           <a:bodyPr rtlCol="0" anchor="ctr"/>
           <a:lstStyle/>
           <a:p>
-            <a:pPr algn="ctr"/>
+            <a:pPr algn="ctr">
+              <a:spcBef>
+                <a:spcPts val="0"/>
+              </a:spcBef>
+              <a:spcAft>
+                <a:spcPts val="0"/>
+              </a:spcAft>
+            </a:pPr>
           </a:p>
         </p:txBody>
       </p:sp>
@@ -8154,9 +8833,16 @@
           </a:bodyPr>
           <a:lstStyle/>
           <a:p>
-            <a:pPr algn="l"/>
-            <a:r>
-              <a:rPr sz="1050" b="1">
+            <a:pPr algn="l">
+              <a:spcBef>
+                <a:spcPts val="0"/>
+              </a:spcBef>
+              <a:spcAft>
+                <a:spcPts val="0"/>
+              </a:spcAft>
+            </a:pPr>
+            <a:r>
+              <a:rPr sz="1050" b="1" lang="zh-CN" altLang="zh-CN">
                 <a:solidFill>
                   <a:srgbClr val="0B3D91"/>
                 </a:solidFill>
@@ -8177,8 +8863,8 @@
         </p:nvSpPr>
         <p:spPr>
           <a:xfrm>
-            <a:off x="7124700" y="5880100"/>
-            <a:ext cx="1295400" cy="215900"/>
+            <a:off x="7124700" y="5839777"/>
+            <a:ext cx="1295400" cy="296545"/>
           </a:xfrm>
           <a:prstGeom prst="rect">
             <a:avLst/>
@@ -8191,9 +8877,16 @@
           </a:bodyPr>
           <a:lstStyle/>
           <a:p>
-            <a:pPr algn="l"/>
-            <a:r>
-              <a:rPr sz="1800" b="1">
+            <a:pPr algn="l">
+              <a:spcBef>
+                <a:spcPts val="0"/>
+              </a:spcBef>
+              <a:spcAft>
+                <a:spcPts val="0"/>
+              </a:spcAft>
+            </a:pPr>
+            <a:r>
+              <a:rPr sz="1800" b="1" lang="zh-CN" altLang="zh-CN">
                 <a:solidFill>
                   <a:srgbClr val="F97316"/>
                 </a:solidFill>
@@ -8228,9 +8921,16 @@
           </a:bodyPr>
           <a:lstStyle/>
           <a:p>
-            <a:pPr algn="l"/>
-            <a:r>
-              <a:rPr sz="950" b="0">
+            <a:pPr algn="l">
+              <a:spcBef>
+                <a:spcPts val="0"/>
+              </a:spcBef>
+              <a:spcAft>
+                <a:spcPts val="0"/>
+              </a:spcAft>
+            </a:pPr>
+            <a:r>
+              <a:rPr sz="950" b="0" lang="zh-CN" altLang="zh-CN">
                 <a:solidFill>
                   <a:srgbClr val="14213D"/>
                 </a:solidFill>
@@ -8319,7 +9019,14 @@
           <a:bodyPr rtlCol="0" anchor="ctr"/>
           <a:lstStyle/>
           <a:p>
-            <a:pPr algn="ctr"/>
+            <a:pPr algn="ctr">
+              <a:spcBef>
+                <a:spcPts val="0"/>
+              </a:spcBef>
+              <a:spcAft>
+                <a:spcPts val="0"/>
+              </a:spcAft>
+            </a:pPr>
           </a:p>
         </p:txBody>
       </p:sp>
@@ -8415,9 +9122,16 @@
           </a:bodyPr>
           <a:lstStyle/>
           <a:p>
-            <a:pPr algn="l"/>
-            <a:r>
-              <a:rPr sz="1050" b="1">
+            <a:pPr algn="l">
+              <a:spcBef>
+                <a:spcPts val="0"/>
+              </a:spcBef>
+              <a:spcAft>
+                <a:spcPts val="0"/>
+              </a:spcAft>
+            </a:pPr>
+            <a:r>
+              <a:rPr sz="1050" b="1" lang="zh-CN" altLang="zh-CN">
                 <a:solidFill>
                   <a:srgbClr val="0B3D91"/>
                 </a:solidFill>
@@ -8438,8 +9152,8 @@
         </p:nvSpPr>
         <p:spPr>
           <a:xfrm>
-            <a:off x="9220200" y="5880100"/>
-            <a:ext cx="1295400" cy="215900"/>
+            <a:off x="9220200" y="5839777"/>
+            <a:ext cx="1295400" cy="296545"/>
           </a:xfrm>
           <a:prstGeom prst="rect">
             <a:avLst/>
@@ -8452,9 +9166,16 @@
           </a:bodyPr>
           <a:lstStyle/>
           <a:p>
-            <a:pPr algn="l"/>
-            <a:r>
-              <a:rPr sz="1800" b="1">
+            <a:pPr algn="l">
+              <a:spcBef>
+                <a:spcPts val="0"/>
+              </a:spcBef>
+              <a:spcAft>
+                <a:spcPts val="0"/>
+              </a:spcAft>
+            </a:pPr>
+            <a:r>
+              <a:rPr sz="1800" b="1" lang="zh-CN" altLang="zh-CN">
                 <a:solidFill>
                   <a:srgbClr val="0B3D91"/>
                 </a:solidFill>
@@ -8489,9 +9210,16 @@
           </a:bodyPr>
           <a:lstStyle/>
           <a:p>
-            <a:pPr algn="l"/>
-            <a:r>
-              <a:rPr sz="950" b="0">
+            <a:pPr algn="l">
+              <a:spcBef>
+                <a:spcPts val="0"/>
+              </a:spcBef>
+              <a:spcAft>
+                <a:spcPts val="0"/>
+              </a:spcAft>
+            </a:pPr>
+            <a:r>
+              <a:rPr sz="950" b="0" lang="zh-CN" altLang="zh-CN">
                 <a:solidFill>
                   <a:srgbClr val="14213D"/>
                 </a:solidFill>
@@ -8526,9 +9254,16 @@
           </a:bodyPr>
           <a:lstStyle/>
           <a:p>
-            <a:pPr algn="l"/>
-            <a:r>
-              <a:rPr sz="900" b="0">
+            <a:pPr algn="l">
+              <a:spcBef>
+                <a:spcPts val="0"/>
+              </a:spcBef>
+              <a:spcAft>
+                <a:spcPts val="0"/>
+              </a:spcAft>
+            </a:pPr>
+            <a:r>
+              <a:rPr sz="900" b="0" lang="zh-CN" altLang="zh-CN">
                 <a:solidFill>
                   <a:srgbClr val="617089"/>
                 </a:solidFill>
